--- a/미마킹확인기능.pptx
+++ b/미마킹확인기능.pptx
@@ -13,7 +13,7 @@
     <p:sldId id="260" r:id="rId7"/>
   </p:sldIdLst>
   <p:sldSz cx="12192000" cy="6858000"/>
-  <p:notesSz cx="6858000" cy="9144000"/>
+  <p:notesSz cx="6797675" cy="9874250"/>
   <p:defaultTextStyle>
     <a:defPPr>
       <a:defRPr lang="ko-KR"/>
@@ -248,7 +248,7 @@
           <a:p>
             <a:fld id="{AA949D12-BE39-49F0-8E3D-94509DD76978}" type="datetimeFigureOut">
               <a:rPr lang="ko-KR" altLang="en-US" smtClean="0"/>
-              <a:t>2025-07-11</a:t>
+              <a:t>2026-01-23</a:t>
             </a:fld>
             <a:endParaRPr lang="ko-KR" altLang="en-US"/>
           </a:p>
@@ -418,7 +418,7 @@
           <a:p>
             <a:fld id="{AA949D12-BE39-49F0-8E3D-94509DD76978}" type="datetimeFigureOut">
               <a:rPr lang="ko-KR" altLang="en-US" smtClean="0"/>
-              <a:t>2025-07-11</a:t>
+              <a:t>2026-01-23</a:t>
             </a:fld>
             <a:endParaRPr lang="ko-KR" altLang="en-US"/>
           </a:p>
@@ -598,7 +598,7 @@
           <a:p>
             <a:fld id="{AA949D12-BE39-49F0-8E3D-94509DD76978}" type="datetimeFigureOut">
               <a:rPr lang="ko-KR" altLang="en-US" smtClean="0"/>
-              <a:t>2025-07-11</a:t>
+              <a:t>2026-01-23</a:t>
             </a:fld>
             <a:endParaRPr lang="ko-KR" altLang="en-US"/>
           </a:p>
@@ -768,7 +768,7 @@
           <a:p>
             <a:fld id="{AA949D12-BE39-49F0-8E3D-94509DD76978}" type="datetimeFigureOut">
               <a:rPr lang="ko-KR" altLang="en-US" smtClean="0"/>
-              <a:t>2025-07-11</a:t>
+              <a:t>2026-01-23</a:t>
             </a:fld>
             <a:endParaRPr lang="ko-KR" altLang="en-US"/>
           </a:p>
@@ -1014,7 +1014,7 @@
           <a:p>
             <a:fld id="{AA949D12-BE39-49F0-8E3D-94509DD76978}" type="datetimeFigureOut">
               <a:rPr lang="ko-KR" altLang="en-US" smtClean="0"/>
-              <a:t>2025-07-11</a:t>
+              <a:t>2026-01-23</a:t>
             </a:fld>
             <a:endParaRPr lang="ko-KR" altLang="en-US"/>
           </a:p>
@@ -1246,7 +1246,7 @@
           <a:p>
             <a:fld id="{AA949D12-BE39-49F0-8E3D-94509DD76978}" type="datetimeFigureOut">
               <a:rPr lang="ko-KR" altLang="en-US" smtClean="0"/>
-              <a:t>2025-07-11</a:t>
+              <a:t>2026-01-23</a:t>
             </a:fld>
             <a:endParaRPr lang="ko-KR" altLang="en-US"/>
           </a:p>
@@ -1613,7 +1613,7 @@
           <a:p>
             <a:fld id="{AA949D12-BE39-49F0-8E3D-94509DD76978}" type="datetimeFigureOut">
               <a:rPr lang="ko-KR" altLang="en-US" smtClean="0"/>
-              <a:t>2025-07-11</a:t>
+              <a:t>2026-01-23</a:t>
             </a:fld>
             <a:endParaRPr lang="ko-KR" altLang="en-US"/>
           </a:p>
@@ -1731,7 +1731,7 @@
           <a:p>
             <a:fld id="{AA949D12-BE39-49F0-8E3D-94509DD76978}" type="datetimeFigureOut">
               <a:rPr lang="ko-KR" altLang="en-US" smtClean="0"/>
-              <a:t>2025-07-11</a:t>
+              <a:t>2026-01-23</a:t>
             </a:fld>
             <a:endParaRPr lang="ko-KR" altLang="en-US"/>
           </a:p>
@@ -1826,7 +1826,7 @@
           <a:p>
             <a:fld id="{AA949D12-BE39-49F0-8E3D-94509DD76978}" type="datetimeFigureOut">
               <a:rPr lang="ko-KR" altLang="en-US" smtClean="0"/>
-              <a:t>2025-07-11</a:t>
+              <a:t>2026-01-23</a:t>
             </a:fld>
             <a:endParaRPr lang="ko-KR" altLang="en-US"/>
           </a:p>
@@ -2103,7 +2103,7 @@
           <a:p>
             <a:fld id="{AA949D12-BE39-49F0-8E3D-94509DD76978}" type="datetimeFigureOut">
               <a:rPr lang="ko-KR" altLang="en-US" smtClean="0"/>
-              <a:t>2025-07-11</a:t>
+              <a:t>2026-01-23</a:t>
             </a:fld>
             <a:endParaRPr lang="ko-KR" altLang="en-US"/>
           </a:p>
@@ -2356,7 +2356,7 @@
           <a:p>
             <a:fld id="{AA949D12-BE39-49F0-8E3D-94509DD76978}" type="datetimeFigureOut">
               <a:rPr lang="ko-KR" altLang="en-US" smtClean="0"/>
-              <a:t>2025-07-11</a:t>
+              <a:t>2026-01-23</a:t>
             </a:fld>
             <a:endParaRPr lang="ko-KR" altLang="en-US"/>
           </a:p>
@@ -2569,7 +2569,7 @@
           <a:p>
             <a:fld id="{AA949D12-BE39-49F0-8E3D-94509DD76978}" type="datetimeFigureOut">
               <a:rPr lang="ko-KR" altLang="en-US" smtClean="0"/>
-              <a:t>2025-07-11</a:t>
+              <a:t>2026-01-23</a:t>
             </a:fld>
             <a:endParaRPr lang="ko-KR" altLang="en-US"/>
           </a:p>
@@ -4864,15 +4864,7 @@
                   <a:srgbClr val="FF0000"/>
                 </a:solidFill>
               </a:rPr>
-              <a:t>8.8</a:t>
-            </a:r>
-            <a:r>
-              <a:rPr lang="en-US" altLang="ko-KR" sz="1000" b="1" dirty="0" smtClean="0">
-                <a:solidFill>
-                  <a:srgbClr val="FF0000"/>
-                </a:solidFill>
-              </a:rPr>
-              <a:t>um * 100pixel = 880um</a:t>
+              <a:t>8.8um * 100pixel = 880um</a:t>
             </a:r>
             <a:endParaRPr lang="ko-KR" altLang="en-US" sz="1000" b="1" dirty="0">
               <a:solidFill>
@@ -5020,15 +5012,7 @@
                   <a:srgbClr val="FF0000"/>
                 </a:solidFill>
               </a:rPr>
-              <a:t>8.8</a:t>
-            </a:r>
-            <a:r>
-              <a:rPr lang="en-US" altLang="ko-KR" sz="1000" b="1" dirty="0" smtClean="0">
-                <a:solidFill>
-                  <a:srgbClr val="FF0000"/>
-                </a:solidFill>
-              </a:rPr>
-              <a:t>um * 100pixel = 880um</a:t>
+              <a:t>8.8um * 100pixel = 880um</a:t>
             </a:r>
             <a:endParaRPr lang="ko-KR" altLang="en-US" sz="1000" b="1" dirty="0">
               <a:solidFill>
